--- a/cursos/recursos/aperturas-y-defensas/10-apertura-inglesa.pptx
+++ b/cursos/recursos/aperturas-y-defensas/10-apertura-inglesa.pptx
@@ -1840,7 +1840,7 @@
                 <a:ea typeface="Cambria" pitchFamily="34" charset="-122"/>
                 <a:cs typeface="Cambria" pitchFamily="34" charset="-120"/>
               </a:rPr>
-              <a:t>identifica a qué otra apertura del temario transpone 1.c4 e5 2.Nc3 Nf6.</a:t>
+              <a:t>identifica a qué otra apertura del temario transpone 1.c4 e5 2.Cc3 Cf6.</a:t>
             </a:r>
             <a:endParaRPr lang="en-US" sz="2200" dirty="0"/>
           </a:p>
